--- a/AI漫剧制作课程/PPT课件/模块05-其他图像生成工具.pptx
+++ b/AI漫剧制作课程/PPT课件/模块05-其他图像生成工具.pptx
@@ -7513,7 +7513,7 @@
               </a:defRPr>
             </a:pPr>
             <a:r>
-              <a:t>🛠️  本模块实操任务</a:t>
+              <a:t>◆  本模块实操任务</a:t>
             </a:r>
           </a:p>
         </p:txBody>
@@ -11280,7 +11280,7 @@
               </a:defRPr>
             </a:pPr>
             <a:r>
-              <a:t>✓</a:t>
+              <a:t>◆</a:t>
             </a:r>
           </a:p>
         </p:txBody>
@@ -13397,7 +13397,7 @@
               </a:defRPr>
             </a:pPr>
             <a:r>
-              <a:t>📋  本节内容</a:t>
+              <a:t>§  本节内容</a:t>
             </a:r>
           </a:p>
         </p:txBody>
